--- a/中間発表/2026-11-05_中間発表ポスター.pptx
+++ b/中間発表/2026-11-05_中間発表ポスター.pptx
@@ -1185,7 +1185,7 @@
                 <a:ea typeface="Yu Gothic" pitchFamily="34" charset="-122"/>
                 <a:cs typeface="Yu Gothic" pitchFamily="34" charset="-120"/>
               </a:rPr>
-              <a:t>屋内ではGNSS(GPS)の信号が弱く，測位が難しい[1]</a:t>
+              <a:t>屋内ではGPS（GNSS）の信号が弱く，測位が難しい[1]</a:t>
             </a:r>
             <a:endParaRPr lang="en-US" sz="3000" dirty="0"/>
           </a:p>
@@ -1233,7 +1233,7 @@
                 <a:ea typeface="Yu Gothic" pitchFamily="34" charset="-122"/>
                 <a:cs typeface="Yu Gothic" pitchFamily="34" charset="-120"/>
               </a:rPr>
-              <a:t>スマートフォンのセンサで位置を積み上げる歩行者推測航法(PDR)は設備不要だが，歩くほど誤差が累積する[2]</a:t>
+              <a:t>スマートフォンの慣性計測装置（IMU）で歩数・歩幅・方位を求めて位置を積み上げる歩行者推測航法（PDR：Pedestrian Dead Reckoning）は設備不要だが，歩くほど誤差が累積する[2]</a:t>
             </a:r>
             <a:endParaRPr lang="en-US" sz="3000" dirty="0"/>
           </a:p>
@@ -1241,7 +1241,7 @@
       </p:sp>
       <p:pic>
         <p:nvPicPr>
-          <p:cNvPr id="10" name="Image 0" descr="/Users/soma/Library/CloudStorage/OneDrive-独立行政法人国立高等専門学校機構/卒業研究/i22satou/中間発表/図/poster/poster_誤差の累積.png">    </p:cNvPr>
+          <p:cNvPr id="10" name="Image 0" descr="中間発表/図/poster/poster_誤差の累積.png">    </p:cNvPr>
           <p:cNvPicPr>
             <a:picLocks noChangeAspect="1"/>
           </p:cNvPicPr>
@@ -1296,7 +1296,7 @@
                 <a:ea typeface="Yu Gothic" pitchFamily="34" charset="-122"/>
                 <a:cs typeface="Yu Gothic" pitchFamily="34" charset="-120"/>
               </a:rPr>
-              <a:t>方位が3度ずれると，30m歩いた時点で推定が壁を通り抜ける(計算例)</a:t>
+              <a:t>方位が3度ずれると，30m歩いた時点で推定が壁を通り抜ける（計算例）</a:t>
             </a:r>
             <a:endParaRPr lang="en-US" sz="2200" dirty="0"/>
           </a:p>
@@ -1504,7 +1504,7 @@
                 <a:ea typeface="Yu Gothic" pitchFamily="34" charset="-122"/>
                 <a:cs typeface="Yu Gothic" pitchFamily="34" charset="-120"/>
               </a:rPr>
-              <a:t>移動様態適応PF[4]（直進・曲がりで粒子数とノイズを変える方式）に，次の2点を加える</a:t>
+              <a:t>移動様態適応パーティクルフィルタ（PF）[4]（直進・曲がり・滞留の様態ごとに粒子数とノイズを変える方式）に，次の2点を加える</a:t>
             </a:r>
             <a:endParaRPr lang="en-US" sz="3000" dirty="0"/>
           </a:p>
@@ -1629,7 +1629,7 @@
                 <a:ea typeface="Yu Gothic" pitchFamily="34" charset="-122"/>
                 <a:cs typeface="Yu Gothic" pitchFamily="34" charset="-120"/>
               </a:rPr>
-              <a:t>二値化した平面図から通路を自動で抽出し，経路帯の外に出た粒子の重みを下げる．経路の手入力は不要</a:t>
+              <a:t>二値化した平面図から通路を経路帯として自動で抽出し，経路帯の外の粒子は重みを0にする．経路の手入力は不要</a:t>
             </a:r>
             <a:endParaRPr lang="en-US" sz="2600" dirty="0"/>
           </a:p>
@@ -1637,7 +1637,7 @@
       </p:sp>
       <p:pic>
         <p:nvPicPr>
-          <p:cNvPr id="21" name="Image 1" descr="/Users/soma/Library/CloudStorage/OneDrive-独立行政法人国立高等専門学校機構/卒業研究/i22satou/中間発表/図/poster/poster_経路帯.png">    </p:cNvPr>
+          <p:cNvPr id="21" name="Image 1" descr="中間発表/図/poster/poster_経路帯.png">    </p:cNvPr>
           <p:cNvPicPr>
             <a:picLocks noChangeAspect="1"/>
           </p:cNvPicPr>
@@ -1778,7 +1778,7 @@
                 <a:ea typeface="Yu Gothic" pitchFamily="34" charset="-122"/>
                 <a:cs typeface="Yu Gothic" pitchFamily="34" charset="-120"/>
               </a:rPr>
-              <a:t>前の歩の比率 r = N</a:t>
+              <a:t>直前の1歩での比率 </a:t>
             </a:r>
             <a:pPr indent="0" marL="0">
               <a:lnSpc>
@@ -1787,7 +1787,7 @@
               <a:buNone/>
             </a:pPr>
             <a:r>
-              <a:rPr lang="en-US" sz="2600" baseline="-40000" dirty="0">
+              <a:rPr lang="en-US" sz="2600" i="1" dirty="0">
                 <a:solidFill>
                   <a:srgbClr val="1F2328"/>
                 </a:solidFill>
@@ -1795,7 +1795,7 @@
                 <a:ea typeface="Yu Gothic" pitchFamily="34" charset="-122"/>
                 <a:cs typeface="Yu Gothic" pitchFamily="34" charset="-120"/>
               </a:rPr>
-              <a:t>eff</a:t>
+              <a:t>r</a:t>
             </a:r>
             <a:pPr indent="0" marL="0">
               <a:lnSpc>
@@ -1812,7 +1812,92 @@
                 <a:ea typeface="Yu Gothic" pitchFamily="34" charset="-122"/>
                 <a:cs typeface="Yu Gothic" pitchFamily="34" charset="-120"/>
               </a:rPr>
-              <a:t>/N が0.30未満なら粒子数を1.5倍，0.60超なら0.75倍(80〜1200個)</a:t>
+              <a:t> = </a:t>
+            </a:r>
+            <a:pPr indent="0" marL="0">
+              <a:lnSpc>
+                <a:spcPct val="110000"/>
+              </a:lnSpc>
+              <a:buNone/>
+            </a:pPr>
+            <a:r>
+              <a:rPr lang="en-US" sz="2600" i="1" dirty="0">
+                <a:solidFill>
+                  <a:srgbClr val="1F2328"/>
+                </a:solidFill>
+                <a:latin typeface="Yu Gothic" pitchFamily="34" charset="0"/>
+                <a:ea typeface="Yu Gothic" pitchFamily="34" charset="-122"/>
+                <a:cs typeface="Yu Gothic" pitchFamily="34" charset="-120"/>
+              </a:rPr>
+              <a:t>N</a:t>
+            </a:r>
+            <a:pPr indent="0" marL="0">
+              <a:lnSpc>
+                <a:spcPct val="110000"/>
+              </a:lnSpc>
+              <a:buNone/>
+            </a:pPr>
+            <a:r>
+              <a:rPr lang="en-US" sz="2600" baseline="-40000" dirty="0">
+                <a:solidFill>
+                  <a:srgbClr val="1F2328"/>
+                </a:solidFill>
+                <a:latin typeface="Yu Gothic" pitchFamily="34" charset="0"/>
+                <a:ea typeface="Yu Gothic" pitchFamily="34" charset="-122"/>
+                <a:cs typeface="Yu Gothic" pitchFamily="34" charset="-120"/>
+              </a:rPr>
+              <a:t>eff</a:t>
+            </a:r>
+            <a:pPr indent="0" marL="0">
+              <a:lnSpc>
+                <a:spcPct val="110000"/>
+              </a:lnSpc>
+              <a:buNone/>
+            </a:pPr>
+            <a:r>
+              <a:rPr lang="en-US" sz="2600" dirty="0">
+                <a:solidFill>
+                  <a:srgbClr val="1F2328"/>
+                </a:solidFill>
+                <a:latin typeface="Yu Gothic" pitchFamily="34" charset="0"/>
+                <a:ea typeface="Yu Gothic" pitchFamily="34" charset="-122"/>
+                <a:cs typeface="Yu Gothic" pitchFamily="34" charset="-120"/>
+              </a:rPr>
+              <a:t>/</a:t>
+            </a:r>
+            <a:pPr indent="0" marL="0">
+              <a:lnSpc>
+                <a:spcPct val="110000"/>
+              </a:lnSpc>
+              <a:buNone/>
+            </a:pPr>
+            <a:r>
+              <a:rPr lang="en-US" sz="2600" i="1" dirty="0">
+                <a:solidFill>
+                  <a:srgbClr val="1F2328"/>
+                </a:solidFill>
+                <a:latin typeface="Yu Gothic" pitchFamily="34" charset="0"/>
+                <a:ea typeface="Yu Gothic" pitchFamily="34" charset="-122"/>
+                <a:cs typeface="Yu Gothic" pitchFamily="34" charset="-120"/>
+              </a:rPr>
+              <a:t>N</a:t>
+            </a:r>
+            <a:pPr indent="0" marL="0">
+              <a:lnSpc>
+                <a:spcPct val="110000"/>
+              </a:lnSpc>
+              <a:buNone/>
+            </a:pPr>
+            <a:r>
+              <a:rPr lang="en-US" sz="2600" dirty="0">
+                <a:solidFill>
+                  <a:srgbClr val="1F2328"/>
+                </a:solidFill>
+                <a:latin typeface="Yu Gothic" pitchFamily="34" charset="0"/>
+                <a:ea typeface="Yu Gothic" pitchFamily="34" charset="-122"/>
+                <a:cs typeface="Yu Gothic" pitchFamily="34" charset="-120"/>
+              </a:rPr>
+              <a:t> が0.30未満なら粒子数を1.5倍，0.60超なら0.75倍にする．上下限の80〜1200個は，粒子数を変えた実験で確かめた</a:t>
             </a:r>
             <a:endParaRPr lang="en-US" sz="2600" dirty="0"/>
           </a:p>
@@ -1820,7 +1905,7 @@
       </p:sp>
       <p:pic>
         <p:nvPicPr>
-          <p:cNvPr id="25" name="Image 2" descr="/Users/soma/Library/CloudStorage/OneDrive-独立行政法人国立高等専門学校機構/卒業研究/i22satou/中間発表/図/poster/poster_式_Neff.png">    </p:cNvPr>
+          <p:cNvPr id="25" name="Image 2" descr="中間発表/図/poster/poster_式_Neff.png">    </p:cNvPr>
           <p:cNvPicPr>
             <a:picLocks noChangeAspect="1"/>
           </p:cNvPicPr>
@@ -1867,6 +1952,34 @@
               <a:buNone/>
             </a:pPr>
             <a:r>
+              <a:rPr lang="en-US" sz="2200" i="1" dirty="0">
+                <a:solidFill>
+                  <a:srgbClr val="5B6168"/>
+                </a:solidFill>
+                <a:latin typeface="Yu Gothic" pitchFamily="34" charset="0"/>
+                <a:ea typeface="Yu Gothic" pitchFamily="34" charset="-122"/>
+                <a:cs typeface="Yu Gothic" pitchFamily="34" charset="-120"/>
+              </a:rPr>
+              <a:t>N</a:t>
+            </a:r>
+            <a:pPr indent="0" marL="0">
+              <a:buNone/>
+            </a:pPr>
+            <a:r>
+              <a:rPr lang="en-US" sz="2200" baseline="-40000" dirty="0">
+                <a:solidFill>
+                  <a:srgbClr val="5B6168"/>
+                </a:solidFill>
+                <a:latin typeface="Yu Gothic" pitchFamily="34" charset="0"/>
+                <a:ea typeface="Yu Gothic" pitchFamily="34" charset="-122"/>
+                <a:cs typeface="Yu Gothic" pitchFamily="34" charset="-120"/>
+              </a:rPr>
+              <a:t>eff</a:t>
+            </a:r>
+            <a:pPr indent="0" marL="0">
+              <a:buNone/>
+            </a:pPr>
+            <a:r>
               <a:rPr lang="en-US" sz="2200" dirty="0">
                 <a:solidFill>
                   <a:srgbClr val="5B6168"/>
@@ -1875,35 +1988,7 @@
                 <a:ea typeface="Yu Gothic" pitchFamily="34" charset="-122"/>
                 <a:cs typeface="Yu Gothic" pitchFamily="34" charset="-120"/>
               </a:rPr>
-              <a:t>N</a:t>
-            </a:r>
-            <a:pPr indent="0" marL="0">
-              <a:buNone/>
-            </a:pPr>
-            <a:r>
-              <a:rPr lang="en-US" sz="2200" baseline="-40000" dirty="0">
-                <a:solidFill>
-                  <a:srgbClr val="5B6168"/>
-                </a:solidFill>
-                <a:latin typeface="Yu Gothic" pitchFamily="34" charset="0"/>
-                <a:ea typeface="Yu Gothic" pitchFamily="34" charset="-122"/>
-                <a:cs typeface="Yu Gothic" pitchFamily="34" charset="-120"/>
-              </a:rPr>
-              <a:t>eff</a:t>
-            </a:r>
-            <a:pPr indent="0" marL="0">
-              <a:buNone/>
-            </a:pPr>
-            <a:r>
-              <a:rPr lang="en-US" sz="2200" dirty="0">
-                <a:solidFill>
-                  <a:srgbClr val="5B6168"/>
-                </a:solidFill>
-                <a:latin typeface="Yu Gothic" pitchFamily="34" charset="0"/>
-                <a:ea typeface="Yu Gothic" pitchFamily="34" charset="-122"/>
-                <a:cs typeface="Yu Gothic" pitchFamily="34" charset="-120"/>
-              </a:rPr>
-              <a:t>：有効粒子数(効いている粒子の数)[5]</a:t>
+              <a:t>：有効粒子数（効いている粒子の数）[5]</a:t>
             </a:r>
             <a:endParaRPr lang="en-US" sz="2200" dirty="0"/>
           </a:p>
@@ -2014,7 +2099,7 @@
       </p:sp>
       <p:pic>
         <p:nvPicPr>
-          <p:cNvPr id="30" name="Image 3" descr="/Users/soma/Library/CloudStorage/OneDrive-独立行政法人国立高等専門学校機構/卒業研究/i22satou/中間発表/図/poster/poster_処理の流れ.png">    </p:cNvPr>
+          <p:cNvPr id="30" name="Image 3" descr="中間発表/図/poster/poster_処理の流れ.png">    </p:cNvPr>
           <p:cNvPicPr>
             <a:picLocks noChangeAspect="1"/>
           </p:cNvPicPr>
@@ -2092,7 +2177,7 @@
                 <a:ea typeface="Yu Gothic" pitchFamily="34" charset="-122"/>
                 <a:cs typeface="Yu Gothic" pitchFamily="34" charset="-120"/>
               </a:rPr>
-              <a:t>SmartPDR[3]で歩を検出し，歩幅と方位から移動量を求める．歩調の上限2.9Hzで過検出を防ぎ，歩幅に校正ゲイン(暫定2.10)を掛ける</a:t>
+              <a:t>SmartPDR[3]で1歩を検出し，歩幅と方位から移動量を求める．歩調の上限2.9Hzで過検出を防ぎ，歩幅に校正ゲイン（暫定値2.10）を掛ける</a:t>
             </a:r>
             <a:endParaRPr lang="en-US" sz="2600" dirty="0"/>
           </a:p>
@@ -2152,7 +2237,7 @@
                 <a:ea typeface="Yu Gothic" pitchFamily="34" charset="-122"/>
                 <a:cs typeface="Yu Gothic" pitchFamily="34" charset="-120"/>
               </a:rPr>
-              <a:t>直近1.5秒の方位変化とヨーレート(75%値)で，直進／曲がりを判定する</a:t>
+              <a:t>直近1.5秒の方位変化と，ヨーレートの75パーセンタイルで，直進／曲がりを判定する</a:t>
             </a:r>
             <a:endParaRPr lang="en-US" sz="2600" dirty="0"/>
           </a:p>
@@ -2212,7 +2297,7 @@
                 <a:ea typeface="Yu Gothic" pitchFamily="34" charset="-122"/>
                 <a:cs typeface="Yu Gothic" pitchFamily="34" charset="-120"/>
               </a:rPr>
-              <a:t>1歩ごとに粒子を動かし，壁を横切った粒子の重みを0にする[4]．壁に近い粒子と，経路帯の外の粒子は重みを下げる</a:t>
+              <a:t>1歩ごとに粒子を動かし，壁を横切った粒子と経路帯の外の粒子の重みを0にする[4]．壁に近い粒子は重みを下げる．歩行が検出されない滞留中は，PFを更新しない</a:t>
             </a:r>
             <a:endParaRPr lang="en-US" sz="2600" dirty="0"/>
           </a:p>
@@ -2598,7 +2683,7 @@
                 <a:ea typeface="Yu Gothic" pitchFamily="34" charset="-122"/>
                 <a:cs typeface="Yu Gothic" pitchFamily="34" charset="-120"/>
               </a:rPr>
-              <a:t>(過検出を是正)</a:t>
+              <a:t>（過検出を是正）</a:t>
             </a:r>
             <a:endParaRPr lang="en-US" sz="2400" dirty="0"/>
           </a:p>
@@ -2664,7 +2749,7 @@
                 <a:ea typeface="Yu Gothic" pitchFamily="34" charset="-122"/>
                 <a:cs typeface="Yu Gothic" pitchFamily="34" charset="-120"/>
               </a:rPr>
-              <a:t>15.6→2.4回</a:t>
+              <a:t>10.7→1.0回</a:t>
             </a:r>
             <a:endParaRPr lang="en-US" sz="5000" dirty="0"/>
           </a:p>
@@ -2703,7 +2788,7 @@
                 <a:ea typeface="Yu Gothic" pitchFamily="34" charset="-122"/>
                 <a:cs typeface="Yu Gothic" pitchFamily="34" charset="-120"/>
               </a:rPr>
-              <a:t>粒子の全滅回数</a:t>
+              <a:t>全滅回数（2本の平均）</a:t>
             </a:r>
             <a:endParaRPr lang="en-US" sz="2400" dirty="0"/>
           </a:p>
@@ -2720,7 +2805,7 @@
                 <a:ea typeface="Yu Gothic" pitchFamily="34" charset="-122"/>
                 <a:cs typeface="Yu Gothic" pitchFamily="34" charset="-120"/>
               </a:rPr>
-              <a:t>(3本の平均)</a:t>
+              <a:t>9月2日の是正の前後</a:t>
             </a:r>
             <a:endParaRPr lang="en-US" sz="2400" dirty="0"/>
           </a:p>
@@ -2881,7 +2966,7 @@
                 <a:ea typeface="Yu Gothic" pitchFamily="34" charset="-122"/>
                 <a:cs typeface="Yu Gothic" pitchFamily="34" charset="-120"/>
               </a:rPr>
-              <a:t>4方式の比較(実測データ 記録1441・1442)</a:t>
+              <a:t>4方式の比較（実測データ 記録1441・1442）</a:t>
             </a:r>
             <a:endParaRPr lang="en-US" sz="3600" dirty="0"/>
           </a:p>
@@ -2889,7 +2974,7 @@
       </p:sp>
       <p:pic>
         <p:nvPicPr>
-          <p:cNvPr id="47" name="Image 4" descr="/Users/soma/Library/CloudStorage/OneDrive-独立行政法人国立高等専門学校機構/卒業研究/i22satou/中間発表/図/poster/poster_推定軌跡_1441_1442.png">    </p:cNvPr>
+          <p:cNvPr id="47" name="Image 4" descr="中間発表/図/poster/poster_推定軌跡_1441_1442.png">    </p:cNvPr>
           <p:cNvPicPr>
             <a:picLocks noChangeAspect="1"/>
           </p:cNvPicPr>
@@ -2944,7 +3029,7 @@
                 <a:ea typeface="Yu Gothic" pitchFamily="34" charset="-122"/>
                 <a:cs typeface="Yu Gothic" pitchFamily="34" charset="-120"/>
               </a:rPr>
-              <a:t>推定軌跡(乱数の初期値42の1回分)</a:t>
+              <a:t>推定軌跡（乱数のシード42の1回分）</a:t>
             </a:r>
             <a:endParaRPr lang="en-US" sz="2200" dirty="0"/>
           </a:p>
@@ -3813,7 +3898,7 @@
                           <a:ea typeface="Yu Gothic" pitchFamily="34" charset="-122"/>
                           <a:cs typeface="Yu Gothic" pitchFamily="34" charset="-120"/>
                         </a:rPr>
-                        <a:t>B 固定粒子数PF(600個)</a:t>
+                        <a:t>B 固定粒子数PF（600個）</a:t>
                       </a:r>
                       <a:endParaRPr lang="en-US" sz="2200" dirty="0">
                         <a:latin typeface="Yu Gothic" charset="0"/>
@@ -4816,7 +4901,7 @@
                 <a:ea typeface="Yu Gothic" pitchFamily="34" charset="-122"/>
                 <a:cs typeface="Yu Gothic" pitchFamily="34" charset="-120"/>
               </a:rPr>
-              <a:t>6シードの平均±標準偏差(Aは乱数を使わないので1回)．2本は条件の調整に用いたデータで評価用ではない．時刻と対応した正解位置がないため，RMSEの代わりに終点誤差(推定の終点と申告した終点の距離)を見た</a:t>
+              <a:t>6シードの平均±標準偏差（Aは乱数を使わないので1回）．2本は条件の調整に用いたデータで評価用ではない．時刻と対応した正解位置がないため，RMSEの代わりに終点誤差（推定の終点と申告した終点の距離）を見た</a:t>
             </a:r>
             <a:endParaRPr lang="en-US" sz="2000" dirty="0"/>
           </a:p>
@@ -4922,7 +5007,7 @@
       </p:sp>
       <p:pic>
         <p:nvPicPr>
-          <p:cNvPr id="53" name="Image 5" descr="/Users/soma/Library/CloudStorage/OneDrive-独立行政法人国立高等専門学校機構/卒業研究/i22satou/中間発表/図/poster/poster_曲がり判定_1441_1442.png">    </p:cNvPr>
+          <p:cNvPr id="53" name="Image 5" descr="中間発表/図/poster/poster_曲がり判定_1441_1442.png">    </p:cNvPr>
           <p:cNvPicPr>
             <a:picLocks noChangeAspect="1"/>
           </p:cNvPicPr>
@@ -4980,7 +5065,7 @@
                 <a:ea typeface="Yu Gothic" pitchFamily="34" charset="-122"/>
                 <a:cs typeface="Yu Gothic" pitchFamily="34" charset="-120"/>
               </a:rPr>
-              <a:t>実際の曲がり角は2か所だが，歩の85〜100%が「曲がり」と判定された</a:t>
+              <a:t>実際の曲がり角は2か所だが，歩数の85〜100%が「曲がり」と判定された</a:t>
             </a:r>
             <a:endParaRPr lang="en-US" sz="2500" dirty="0"/>
           </a:p>
@@ -5020,7 +5105,7 @@
                 <a:ea typeface="Yu Gothic" pitchFamily="34" charset="-122"/>
                 <a:cs typeface="Yu Gothic" pitchFamily="34" charset="-120"/>
               </a:rPr>
-              <a:t>直進中も歩行の揺れでヨーレートが15〜19度/秒あり，曲がり終了の条件(10度/秒未満)を下回らない</a:t>
+              <a:t>直進中も歩行の揺れでヨーレートが15〜19度/秒あり，曲がりを終えるしきい値（10度/秒）を下回らない</a:t>
             </a:r>
             <a:endParaRPr lang="en-US" sz="2500" dirty="0"/>
           </a:p>
@@ -5060,7 +5145,7 @@
                 <a:ea typeface="Yu Gothic" pitchFamily="34" charset="-122"/>
                 <a:cs typeface="Yu Gothic" pitchFamily="34" charset="-120"/>
               </a:rPr>
-              <a:t>→ 今は，移動様態に合わせる効果(BとCの差)を示せていない</a:t>
+              <a:t>→ 今は，移動様態に合わせる効果（BとCの差）を示せていない</a:t>
             </a:r>
             <a:endParaRPr lang="en-US" sz="2500" dirty="0"/>
           </a:p>
@@ -5404,7 +5489,7 @@
                 <a:ea typeface="Yu Gothic" pitchFamily="34" charset="-122"/>
                 <a:cs typeface="Yu Gothic" pitchFamily="34" charset="-120"/>
               </a:rPr>
-              <a:t>歩幅の校正ゲインと曲がり判定のしきい値を校正用データで決める</a:t>
+              <a:t>歩幅の校正ゲインと曲がり終了のしきい値を校正用データで決め直す</a:t>
             </a:r>
             <a:endParaRPr lang="en-US" sz="2100" dirty="0"/>
           </a:p>
@@ -5537,7 +5622,7 @@
                 <a:ea typeface="Yu Gothic" pitchFamily="34" charset="-122"/>
                 <a:cs typeface="Yu Gothic" pitchFamily="34" charset="-120"/>
               </a:rPr>
-              <a:t>正解位置を使い4方式と提案1・2の効果を確かめる(11月末まで)</a:t>
+              <a:t>正解位置を用いたRMSEで4方式を比べ，提案1・2の効果を確かめる（11月末まで）</a:t>
             </a:r>
             <a:endParaRPr lang="en-US" sz="2100" dirty="0"/>
           </a:p>
